--- a/public/fun/cards/food/food-30.pptx
+++ b/public/fun/cards/food/food-30.pptx
@@ -3085,7 +3085,7 @@
     <p:bg>
       <p:bgPr>
         <a:solidFill>
-          <a:srgbClr val="5E4226"/>
+          <a:srgbClr val="F3F4F6"/>
         </a:solidFill>
         <a:effectLst/>
       </p:bgPr>
@@ -3099,692 +3099,14 @@
       <p:grpSpPr/>
       <p:sp>
         <p:nvSpPr>
-          <p:cNvPr id="2" name="Oval 1"/>
-          <p:cNvSpPr/>
+          <p:cNvPr id="2" name="텍스트"/>
+          <p:cNvSpPr txBox="1"/>
           <p:nvPr/>
         </p:nvSpPr>
         <p:spPr>
           <a:xfrm>
-            <a:off x="2462400" y="158400"/>
-            <a:ext cx="43200" cy="43200"/>
-          </a:xfrm>
-          <a:prstGeom prst="ellipse">
-            <a:avLst/>
-          </a:prstGeom>
-          <a:solidFill>
-            <a:srgbClr val="EFE0D2">
-              <a:alpha val="70000"/>
-            </a:srgbClr>
-          </a:solidFill>
-          <a:ln>
-            <a:noFill/>
-          </a:ln>
-        </p:spPr>
-        <p:txBody>
-          <a:bodyPr rtlCol="0" anchor="ctr"/>
-          <a:lstStyle/>
-          <a:p>
-            <a:pPr algn="ctr"/>
-          </a:p>
-        </p:txBody>
-      </p:sp>
-      <p:sp>
-        <p:nvSpPr>
-          <p:cNvPr id="3" name="Oval 2"/>
-          <p:cNvSpPr/>
-          <p:nvPr/>
-        </p:nvSpPr>
-        <p:spPr>
-          <a:xfrm>
-            <a:off x="2462400" y="266400"/>
-            <a:ext cx="43200" cy="43200"/>
-          </a:xfrm>
-          <a:prstGeom prst="ellipse">
-            <a:avLst/>
-          </a:prstGeom>
-          <a:solidFill>
-            <a:srgbClr val="EFE0D2">
-              <a:alpha val="57999"/>
-            </a:srgbClr>
-          </a:solidFill>
-          <a:ln>
-            <a:noFill/>
-          </a:ln>
-        </p:spPr>
-        <p:txBody>
-          <a:bodyPr rtlCol="0" anchor="ctr"/>
-          <a:lstStyle/>
-          <a:p>
-            <a:pPr algn="ctr"/>
-          </a:p>
-        </p:txBody>
-      </p:sp>
-      <p:sp>
-        <p:nvSpPr>
-          <p:cNvPr id="4" name="Oval 3"/>
-          <p:cNvSpPr/>
-          <p:nvPr/>
-        </p:nvSpPr>
-        <p:spPr>
-          <a:xfrm>
-            <a:off x="2462400" y="374400"/>
-            <a:ext cx="43200" cy="43200"/>
-          </a:xfrm>
-          <a:prstGeom prst="ellipse">
-            <a:avLst/>
-          </a:prstGeom>
-          <a:solidFill>
-            <a:srgbClr val="EFE0D2">
-              <a:alpha val="46000"/>
-            </a:srgbClr>
-          </a:solidFill>
-          <a:ln>
-            <a:noFill/>
-          </a:ln>
-        </p:spPr>
-        <p:txBody>
-          <a:bodyPr rtlCol="0" anchor="ctr"/>
-          <a:lstStyle/>
-          <a:p>
-            <a:pPr algn="ctr"/>
-          </a:p>
-        </p:txBody>
-      </p:sp>
-      <p:sp>
-        <p:nvSpPr>
-          <p:cNvPr id="5" name="Oval 4"/>
-          <p:cNvSpPr/>
-          <p:nvPr/>
-        </p:nvSpPr>
-        <p:spPr>
-          <a:xfrm>
-            <a:off x="2462400" y="482400"/>
-            <a:ext cx="43200" cy="43200"/>
-          </a:xfrm>
-          <a:prstGeom prst="ellipse">
-            <a:avLst/>
-          </a:prstGeom>
-          <a:solidFill>
-            <a:srgbClr val="EFE0D2">
-              <a:alpha val="34000"/>
-            </a:srgbClr>
-          </a:solidFill>
-          <a:ln>
-            <a:noFill/>
-          </a:ln>
-        </p:spPr>
-        <p:txBody>
-          <a:bodyPr rtlCol="0" anchor="ctr"/>
-          <a:lstStyle/>
-          <a:p>
-            <a:pPr algn="ctr"/>
-          </a:p>
-        </p:txBody>
-      </p:sp>
-      <p:sp>
-        <p:nvSpPr>
-          <p:cNvPr id="6" name="Oval 5"/>
-          <p:cNvSpPr/>
-          <p:nvPr/>
-        </p:nvSpPr>
-        <p:spPr>
-          <a:xfrm>
-            <a:off x="2570400" y="158400"/>
-            <a:ext cx="43200" cy="43200"/>
-          </a:xfrm>
-          <a:prstGeom prst="ellipse">
-            <a:avLst/>
-          </a:prstGeom>
-          <a:solidFill>
-            <a:srgbClr val="EFE0D2">
-              <a:alpha val="70000"/>
-            </a:srgbClr>
-          </a:solidFill>
-          <a:ln>
-            <a:noFill/>
-          </a:ln>
-        </p:spPr>
-        <p:txBody>
-          <a:bodyPr rtlCol="0" anchor="ctr"/>
-          <a:lstStyle/>
-          <a:p>
-            <a:pPr algn="ctr"/>
-          </a:p>
-        </p:txBody>
-      </p:sp>
-      <p:sp>
-        <p:nvSpPr>
-          <p:cNvPr id="7" name="Oval 6"/>
-          <p:cNvSpPr/>
-          <p:nvPr/>
-        </p:nvSpPr>
-        <p:spPr>
-          <a:xfrm>
-            <a:off x="2570400" y="266400"/>
-            <a:ext cx="43200" cy="43200"/>
-          </a:xfrm>
-          <a:prstGeom prst="ellipse">
-            <a:avLst/>
-          </a:prstGeom>
-          <a:solidFill>
-            <a:srgbClr val="EFE0D2">
-              <a:alpha val="57999"/>
-            </a:srgbClr>
-          </a:solidFill>
-          <a:ln>
-            <a:noFill/>
-          </a:ln>
-        </p:spPr>
-        <p:txBody>
-          <a:bodyPr rtlCol="0" anchor="ctr"/>
-          <a:lstStyle/>
-          <a:p>
-            <a:pPr algn="ctr"/>
-          </a:p>
-        </p:txBody>
-      </p:sp>
-      <p:sp>
-        <p:nvSpPr>
-          <p:cNvPr id="8" name="Oval 7"/>
-          <p:cNvSpPr/>
-          <p:nvPr/>
-        </p:nvSpPr>
-        <p:spPr>
-          <a:xfrm>
-            <a:off x="2570400" y="374400"/>
-            <a:ext cx="43200" cy="43200"/>
-          </a:xfrm>
-          <a:prstGeom prst="ellipse">
-            <a:avLst/>
-          </a:prstGeom>
-          <a:solidFill>
-            <a:srgbClr val="EFE0D2">
-              <a:alpha val="46000"/>
-            </a:srgbClr>
-          </a:solidFill>
-          <a:ln>
-            <a:noFill/>
-          </a:ln>
-        </p:spPr>
-        <p:txBody>
-          <a:bodyPr rtlCol="0" anchor="ctr"/>
-          <a:lstStyle/>
-          <a:p>
-            <a:pPr algn="ctr"/>
-          </a:p>
-        </p:txBody>
-      </p:sp>
-      <p:sp>
-        <p:nvSpPr>
-          <p:cNvPr id="9" name="Oval 8"/>
-          <p:cNvSpPr/>
-          <p:nvPr/>
-        </p:nvSpPr>
-        <p:spPr>
-          <a:xfrm>
-            <a:off x="2570400" y="482400"/>
-            <a:ext cx="43200" cy="43200"/>
-          </a:xfrm>
-          <a:prstGeom prst="ellipse">
-            <a:avLst/>
-          </a:prstGeom>
-          <a:solidFill>
-            <a:srgbClr val="EFE0D2">
-              <a:alpha val="34000"/>
-            </a:srgbClr>
-          </a:solidFill>
-          <a:ln>
-            <a:noFill/>
-          </a:ln>
-        </p:spPr>
-        <p:txBody>
-          <a:bodyPr rtlCol="0" anchor="ctr"/>
-          <a:lstStyle/>
-          <a:p>
-            <a:pPr algn="ctr"/>
-          </a:p>
-        </p:txBody>
-      </p:sp>
-      <p:sp>
-        <p:nvSpPr>
-          <p:cNvPr id="10" name="Oval 9"/>
-          <p:cNvSpPr/>
-          <p:nvPr/>
-        </p:nvSpPr>
-        <p:spPr>
-          <a:xfrm>
-            <a:off x="2678400" y="158400"/>
-            <a:ext cx="43200" cy="43200"/>
-          </a:xfrm>
-          <a:prstGeom prst="ellipse">
-            <a:avLst/>
-          </a:prstGeom>
-          <a:solidFill>
-            <a:srgbClr val="EFE0D2">
-              <a:alpha val="70000"/>
-            </a:srgbClr>
-          </a:solidFill>
-          <a:ln>
-            <a:noFill/>
-          </a:ln>
-        </p:spPr>
-        <p:txBody>
-          <a:bodyPr rtlCol="0" anchor="ctr"/>
-          <a:lstStyle/>
-          <a:p>
-            <a:pPr algn="ctr"/>
-          </a:p>
-        </p:txBody>
-      </p:sp>
-      <p:sp>
-        <p:nvSpPr>
-          <p:cNvPr id="11" name="Oval 10"/>
-          <p:cNvSpPr/>
-          <p:nvPr/>
-        </p:nvSpPr>
-        <p:spPr>
-          <a:xfrm>
-            <a:off x="2678400" y="266400"/>
-            <a:ext cx="43200" cy="43200"/>
-          </a:xfrm>
-          <a:prstGeom prst="ellipse">
-            <a:avLst/>
-          </a:prstGeom>
-          <a:solidFill>
-            <a:srgbClr val="EFE0D2">
-              <a:alpha val="57999"/>
-            </a:srgbClr>
-          </a:solidFill>
-          <a:ln>
-            <a:noFill/>
-          </a:ln>
-        </p:spPr>
-        <p:txBody>
-          <a:bodyPr rtlCol="0" anchor="ctr"/>
-          <a:lstStyle/>
-          <a:p>
-            <a:pPr algn="ctr"/>
-          </a:p>
-        </p:txBody>
-      </p:sp>
-      <p:sp>
-        <p:nvSpPr>
-          <p:cNvPr id="12" name="Oval 11"/>
-          <p:cNvSpPr/>
-          <p:nvPr/>
-        </p:nvSpPr>
-        <p:spPr>
-          <a:xfrm>
-            <a:off x="2678400" y="374400"/>
-            <a:ext cx="43200" cy="43200"/>
-          </a:xfrm>
-          <a:prstGeom prst="ellipse">
-            <a:avLst/>
-          </a:prstGeom>
-          <a:solidFill>
-            <a:srgbClr val="EFE0D2">
-              <a:alpha val="46000"/>
-            </a:srgbClr>
-          </a:solidFill>
-          <a:ln>
-            <a:noFill/>
-          </a:ln>
-        </p:spPr>
-        <p:txBody>
-          <a:bodyPr rtlCol="0" anchor="ctr"/>
-          <a:lstStyle/>
-          <a:p>
-            <a:pPr algn="ctr"/>
-          </a:p>
-        </p:txBody>
-      </p:sp>
-      <p:sp>
-        <p:nvSpPr>
-          <p:cNvPr id="13" name="Oval 12"/>
-          <p:cNvSpPr/>
-          <p:nvPr/>
-        </p:nvSpPr>
-        <p:spPr>
-          <a:xfrm>
-            <a:off x="2678400" y="482400"/>
-            <a:ext cx="43200" cy="43200"/>
-          </a:xfrm>
-          <a:prstGeom prst="ellipse">
-            <a:avLst/>
-          </a:prstGeom>
-          <a:solidFill>
-            <a:srgbClr val="EFE0D2">
-              <a:alpha val="34000"/>
-            </a:srgbClr>
-          </a:solidFill>
-          <a:ln>
-            <a:noFill/>
-          </a:ln>
-        </p:spPr>
-        <p:txBody>
-          <a:bodyPr rtlCol="0" anchor="ctr"/>
-          <a:lstStyle/>
-          <a:p>
-            <a:pPr algn="ctr"/>
-          </a:p>
-        </p:txBody>
-      </p:sp>
-      <p:sp>
-        <p:nvSpPr>
-          <p:cNvPr id="14" name="Oval 13"/>
-          <p:cNvSpPr/>
-          <p:nvPr/>
-        </p:nvSpPr>
-        <p:spPr>
-          <a:xfrm>
-            <a:off x="2786400" y="158400"/>
-            <a:ext cx="43200" cy="43200"/>
-          </a:xfrm>
-          <a:prstGeom prst="ellipse">
-            <a:avLst/>
-          </a:prstGeom>
-          <a:solidFill>
-            <a:srgbClr val="EFE0D2">
-              <a:alpha val="70000"/>
-            </a:srgbClr>
-          </a:solidFill>
-          <a:ln>
-            <a:noFill/>
-          </a:ln>
-        </p:spPr>
-        <p:txBody>
-          <a:bodyPr rtlCol="0" anchor="ctr"/>
-          <a:lstStyle/>
-          <a:p>
-            <a:pPr algn="ctr"/>
-          </a:p>
-        </p:txBody>
-      </p:sp>
-      <p:sp>
-        <p:nvSpPr>
-          <p:cNvPr id="15" name="Oval 14"/>
-          <p:cNvSpPr/>
-          <p:nvPr/>
-        </p:nvSpPr>
-        <p:spPr>
-          <a:xfrm>
-            <a:off x="2786400" y="266400"/>
-            <a:ext cx="43200" cy="43200"/>
-          </a:xfrm>
-          <a:prstGeom prst="ellipse">
-            <a:avLst/>
-          </a:prstGeom>
-          <a:solidFill>
-            <a:srgbClr val="EFE0D2">
-              <a:alpha val="57999"/>
-            </a:srgbClr>
-          </a:solidFill>
-          <a:ln>
-            <a:noFill/>
-          </a:ln>
-        </p:spPr>
-        <p:txBody>
-          <a:bodyPr rtlCol="0" anchor="ctr"/>
-          <a:lstStyle/>
-          <a:p>
-            <a:pPr algn="ctr"/>
-          </a:p>
-        </p:txBody>
-      </p:sp>
-      <p:sp>
-        <p:nvSpPr>
-          <p:cNvPr id="16" name="Oval 15"/>
-          <p:cNvSpPr/>
-          <p:nvPr/>
-        </p:nvSpPr>
-        <p:spPr>
-          <a:xfrm>
-            <a:off x="2786400" y="374400"/>
-            <a:ext cx="43200" cy="43200"/>
-          </a:xfrm>
-          <a:prstGeom prst="ellipse">
-            <a:avLst/>
-          </a:prstGeom>
-          <a:solidFill>
-            <a:srgbClr val="EFE0D2">
-              <a:alpha val="46000"/>
-            </a:srgbClr>
-          </a:solidFill>
-          <a:ln>
-            <a:noFill/>
-          </a:ln>
-        </p:spPr>
-        <p:txBody>
-          <a:bodyPr rtlCol="0" anchor="ctr"/>
-          <a:lstStyle/>
-          <a:p>
-            <a:pPr algn="ctr"/>
-          </a:p>
-        </p:txBody>
-      </p:sp>
-      <p:sp>
-        <p:nvSpPr>
-          <p:cNvPr id="17" name="Oval 16"/>
-          <p:cNvSpPr/>
-          <p:nvPr/>
-        </p:nvSpPr>
-        <p:spPr>
-          <a:xfrm>
-            <a:off x="2786400" y="482400"/>
-            <a:ext cx="43200" cy="43200"/>
-          </a:xfrm>
-          <a:prstGeom prst="ellipse">
-            <a:avLst/>
-          </a:prstGeom>
-          <a:solidFill>
-            <a:srgbClr val="EFE0D2">
-              <a:alpha val="34000"/>
-            </a:srgbClr>
-          </a:solidFill>
-          <a:ln>
-            <a:noFill/>
-          </a:ln>
-        </p:spPr>
-        <p:txBody>
-          <a:bodyPr rtlCol="0" anchor="ctr"/>
-          <a:lstStyle/>
-          <a:p>
-            <a:pPr algn="ctr"/>
-          </a:p>
-        </p:txBody>
-      </p:sp>
-      <p:sp>
-        <p:nvSpPr>
-          <p:cNvPr id="18" name="Oval 17"/>
-          <p:cNvSpPr/>
-          <p:nvPr/>
-        </p:nvSpPr>
-        <p:spPr>
-          <a:xfrm>
-            <a:off x="2894400" y="158400"/>
-            <a:ext cx="43200" cy="43200"/>
-          </a:xfrm>
-          <a:prstGeom prst="ellipse">
-            <a:avLst/>
-          </a:prstGeom>
-          <a:solidFill>
-            <a:srgbClr val="EFE0D2">
-              <a:alpha val="70000"/>
-            </a:srgbClr>
-          </a:solidFill>
-          <a:ln>
-            <a:noFill/>
-          </a:ln>
-        </p:spPr>
-        <p:txBody>
-          <a:bodyPr rtlCol="0" anchor="ctr"/>
-          <a:lstStyle/>
-          <a:p>
-            <a:pPr algn="ctr"/>
-          </a:p>
-        </p:txBody>
-      </p:sp>
-      <p:sp>
-        <p:nvSpPr>
-          <p:cNvPr id="19" name="Oval 18"/>
-          <p:cNvSpPr/>
-          <p:nvPr/>
-        </p:nvSpPr>
-        <p:spPr>
-          <a:xfrm>
-            <a:off x="2894400" y="266400"/>
-            <a:ext cx="43200" cy="43200"/>
-          </a:xfrm>
-          <a:prstGeom prst="ellipse">
-            <a:avLst/>
-          </a:prstGeom>
-          <a:solidFill>
-            <a:srgbClr val="EFE0D2">
-              <a:alpha val="57999"/>
-            </a:srgbClr>
-          </a:solidFill>
-          <a:ln>
-            <a:noFill/>
-          </a:ln>
-        </p:spPr>
-        <p:txBody>
-          <a:bodyPr rtlCol="0" anchor="ctr"/>
-          <a:lstStyle/>
-          <a:p>
-            <a:pPr algn="ctr"/>
-          </a:p>
-        </p:txBody>
-      </p:sp>
-      <p:sp>
-        <p:nvSpPr>
-          <p:cNvPr id="20" name="Oval 19"/>
-          <p:cNvSpPr/>
-          <p:nvPr/>
-        </p:nvSpPr>
-        <p:spPr>
-          <a:xfrm>
-            <a:off x="2894400" y="374400"/>
-            <a:ext cx="43200" cy="43200"/>
-          </a:xfrm>
-          <a:prstGeom prst="ellipse">
-            <a:avLst/>
-          </a:prstGeom>
-          <a:solidFill>
-            <a:srgbClr val="EFE0D2">
-              <a:alpha val="46000"/>
-            </a:srgbClr>
-          </a:solidFill>
-          <a:ln>
-            <a:noFill/>
-          </a:ln>
-        </p:spPr>
-        <p:txBody>
-          <a:bodyPr rtlCol="0" anchor="ctr"/>
-          <a:lstStyle/>
-          <a:p>
-            <a:pPr algn="ctr"/>
-          </a:p>
-        </p:txBody>
-      </p:sp>
-      <p:sp>
-        <p:nvSpPr>
-          <p:cNvPr id="21" name="Oval 20"/>
-          <p:cNvSpPr/>
-          <p:nvPr/>
-        </p:nvSpPr>
-        <p:spPr>
-          <a:xfrm>
-            <a:off x="2894400" y="482400"/>
-            <a:ext cx="43200" cy="43200"/>
-          </a:xfrm>
-          <a:prstGeom prst="ellipse">
-            <a:avLst/>
-          </a:prstGeom>
-          <a:solidFill>
-            <a:srgbClr val="EFE0D2">
-              <a:alpha val="34000"/>
-            </a:srgbClr>
-          </a:solidFill>
-          <a:ln>
-            <a:noFill/>
-          </a:ln>
-        </p:spPr>
-        <p:txBody>
-          <a:bodyPr rtlCol="0" anchor="ctr"/>
-          <a:lstStyle/>
-          <a:p>
-            <a:pPr algn="ctr"/>
-          </a:p>
-        </p:txBody>
-      </p:sp>
-      <p:sp>
-        <p:nvSpPr>
-          <p:cNvPr id="22" name="Rectangle 21"/>
-          <p:cNvSpPr/>
-          <p:nvPr/>
-        </p:nvSpPr>
-        <p:spPr>
-          <a:xfrm>
-            <a:off x="0" y="1663200"/>
-            <a:ext cx="3240000" cy="136800"/>
-          </a:xfrm>
-          <a:prstGeom prst="rect">
-            <a:avLst/>
-          </a:prstGeom>
-          <a:solidFill>
-            <a:srgbClr val="EFE0D2"/>
-          </a:solidFill>
-          <a:ln>
-            <a:noFill/>
-          </a:ln>
-        </p:spPr>
-        <p:txBody>
-          <a:bodyPr rtlCol="0" anchor="ctr"/>
-          <a:lstStyle/>
-          <a:p>
-            <a:pPr algn="ctr"/>
-          </a:p>
-        </p:txBody>
-      </p:sp>
-      <p:sp>
-        <p:nvSpPr>
-          <p:cNvPr id="23" name="Rectangle 22"/>
-          <p:cNvSpPr/>
-          <p:nvPr/>
-        </p:nvSpPr>
-        <p:spPr>
-          <a:xfrm>
-            <a:off x="0" y="1663200"/>
-            <a:ext cx="936000" cy="136800"/>
-          </a:xfrm>
-          <a:prstGeom prst="rect">
-            <a:avLst/>
-          </a:prstGeom>
-          <a:solidFill>
-            <a:srgbClr val="786049"/>
-          </a:solidFill>
-          <a:ln>
-            <a:noFill/>
-          </a:ln>
-        </p:spPr>
-        <p:txBody>
-          <a:bodyPr rtlCol="0" anchor="ctr"/>
-          <a:lstStyle/>
-          <a:p>
-            <a:pPr algn="ctr"/>
-          </a:p>
-        </p:txBody>
-      </p:sp>
-      <p:sp>
-        <p:nvSpPr>
-          <p:cNvPr id="24" name="텍스트"/>
-          <p:cNvSpPr txBox="1"/>
-          <p:nvPr/>
-        </p:nvSpPr>
-        <p:spPr>
-          <a:xfrm>
-            <a:off x="252000" y="208800"/>
-            <a:ext cx="1800000" cy="100800"/>
+            <a:off x="252000" y="223200"/>
+            <a:ext cx="2016000" cy="133351"/>
           </a:xfrm>
           <a:prstGeom prst="rect">
             <a:avLst/>
@@ -3799,13 +3121,13 @@
           <a:p>
             <a:pPr algn="l">
               <a:lnSpc>
-                <a:spcPts val="1087"/>
+                <a:spcPts val="1015"/>
               </a:lnSpc>
             </a:pPr>
             <a:r>
-              <a:rPr sz="750" b="1" spc="150">
+              <a:rPr sz="700" b="1" spc="200">
                 <a:solidFill>
-                  <a:srgbClr val="C7BDB3"/>
+                  <a:srgbClr val="6B7280"/>
                 </a:solidFill>
                 <a:latin typeface="맑은 고딕"/>
                 <a:ea typeface="맑은 고딕"/>
@@ -3817,14 +3139,14 @@
       </p:sp>
       <p:sp>
         <p:nvSpPr>
-          <p:cNvPr id="25" name="텍스트"/>
+          <p:cNvPr id="3" name="텍스트"/>
           <p:cNvSpPr txBox="1"/>
           <p:nvPr/>
         </p:nvSpPr>
         <p:spPr>
           <a:xfrm>
-            <a:off x="252000" y="540000"/>
-            <a:ext cx="2016000" cy="313692"/>
+            <a:off x="252000" y="468000"/>
+            <a:ext cx="2520000" cy="360000"/>
           </a:xfrm>
           <a:prstGeom prst="rect">
             <a:avLst/>
@@ -3839,13 +3161,13 @@
           <a:p>
             <a:pPr algn="l">
               <a:lnSpc>
-                <a:spcPts val="2755"/>
+                <a:spcPts val="3190"/>
               </a:lnSpc>
             </a:pPr>
             <a:r>
-              <a:rPr sz="1900" b="1" spc="50">
+              <a:rPr sz="2200" b="1">
                 <a:solidFill>
-                  <a:srgbClr val="FFFFFF"/>
+                  <a:srgbClr val="12151C"/>
                 </a:solidFill>
                 <a:latin typeface="맑은 고딕"/>
                 <a:ea typeface="맑은 고딕"/>
@@ -3857,14 +3179,14 @@
       </p:sp>
       <p:sp>
         <p:nvSpPr>
-          <p:cNvPr id="26" name="텍스트"/>
+          <p:cNvPr id="4" name="텍스트"/>
           <p:cNvSpPr txBox="1"/>
           <p:nvPr/>
         </p:nvSpPr>
         <p:spPr>
           <a:xfrm>
-            <a:off x="252000" y="828000"/>
-            <a:ext cx="2016000" cy="122400"/>
+            <a:off x="252000" y="871200"/>
+            <a:ext cx="2520000" cy="171451"/>
           </a:xfrm>
           <a:prstGeom prst="rect">
             <a:avLst/>
@@ -3879,13 +3201,13 @@
           <a:p>
             <a:pPr algn="l">
               <a:lnSpc>
-                <a:spcPts val="1232"/>
+                <a:spcPts val="1305"/>
               </a:lnSpc>
             </a:pPr>
             <a:r>
-              <a:rPr sz="850" b="1">
+              <a:rPr sz="900" b="0">
                 <a:solidFill>
-                  <a:srgbClr val="EFE0D2"/>
+                  <a:srgbClr val="6B7280"/>
                 </a:solidFill>
                 <a:latin typeface="맑은 고딕"/>
                 <a:ea typeface="맑은 고딕"/>
@@ -3897,14 +3219,14 @@
       </p:sp>
       <p:sp>
         <p:nvSpPr>
-          <p:cNvPr id="27" name="텍스트"/>
+          <p:cNvPr id="5" name="텍스트"/>
           <p:cNvSpPr txBox="1"/>
           <p:nvPr/>
         </p:nvSpPr>
         <p:spPr>
           <a:xfrm>
-            <a:off x="252000" y="1108800"/>
-            <a:ext cx="122400" cy="168911"/>
+            <a:off x="252000" y="1216800"/>
+            <a:ext cx="2520000" cy="129541"/>
           </a:xfrm>
           <a:prstGeom prst="rect">
             <a:avLst/>
@@ -3919,32 +3241,61 @@
           <a:p>
             <a:pPr algn="l">
               <a:lnSpc>
-                <a:spcPts val="1015"/>
+                <a:spcPts val="986"/>
               </a:lnSpc>
             </a:pPr>
             <a:r>
-              <a:rPr sz="700" b="1">
+              <a:rPr sz="680" b="0">
                 <a:solidFill>
-                  <a:srgbClr val="EFE0D2"/>
+                  <a:srgbClr val="6B7280"/>
                 </a:solidFill>
                 <a:latin typeface="맑은 고딕"/>
                 <a:ea typeface="맑은 고딕"/>
               </a:rPr>
-              <a:t>T</a:t>
-            </a:r>
-          </a:p>
-        </p:txBody>
-      </p:sp>
-      <p:sp>
-        <p:nvSpPr>
-          <p:cNvPr id="28" name="텍스트"/>
+              <a:t>주소를 입력해 주세요</a:t>
+            </a:r>
+          </a:p>
+        </p:txBody>
+      </p:sp>
+      <p:sp>
+        <p:nvSpPr>
+          <p:cNvPr id="6" name="Rectangle 5"/>
+          <p:cNvSpPr/>
+          <p:nvPr/>
+        </p:nvSpPr>
+        <p:spPr>
+          <a:xfrm>
+            <a:off x="0" y="1476000"/>
+            <a:ext cx="3240000" cy="324000"/>
+          </a:xfrm>
+          <a:prstGeom prst="rect">
+            <a:avLst/>
+          </a:prstGeom>
+          <a:solidFill>
+            <a:srgbClr val="5CD65C"/>
+          </a:solidFill>
+          <a:ln>
+            <a:noFill/>
+          </a:ln>
+        </p:spPr>
+        <p:txBody>
+          <a:bodyPr rtlCol="0" anchor="ctr"/>
+          <a:lstStyle/>
+          <a:p>
+            <a:pPr algn="ctr"/>
+          </a:p>
+        </p:txBody>
+      </p:sp>
+      <p:sp>
+        <p:nvSpPr>
+          <p:cNvPr id="7" name="텍스트"/>
           <p:cNvSpPr txBox="1"/>
           <p:nvPr/>
         </p:nvSpPr>
         <p:spPr>
           <a:xfrm>
-            <a:off x="396000" y="1108800"/>
-            <a:ext cx="1584000" cy="168911"/>
+            <a:off x="252000" y="1569600"/>
+            <a:ext cx="1296000" cy="133351"/>
           </a:xfrm>
           <a:prstGeom prst="rect">
             <a:avLst/>
@@ -3963,9 +3314,9 @@
               </a:lnSpc>
             </a:pPr>
             <a:r>
-              <a:rPr sz="700" b="0">
+              <a:rPr sz="700" b="1">
                 <a:solidFill>
-                  <a:srgbClr val="FFFFFF"/>
+                  <a:srgbClr val="12151C"/>
                 </a:solidFill>
                 <a:latin typeface="맑은 고딕"/>
                 <a:ea typeface="맑은 고딕"/>
@@ -3977,14 +3328,14 @@
       </p:sp>
       <p:sp>
         <p:nvSpPr>
-          <p:cNvPr id="29" name="텍스트"/>
+          <p:cNvPr id="8" name="텍스트"/>
           <p:cNvSpPr txBox="1"/>
           <p:nvPr/>
         </p:nvSpPr>
         <p:spPr>
           <a:xfrm>
-            <a:off x="252000" y="1277711"/>
-            <a:ext cx="122400" cy="168911"/>
+            <a:off x="1656000" y="1569600"/>
+            <a:ext cx="1368000" cy="133351"/>
           </a:xfrm>
           <a:prstGeom prst="rect">
             <a:avLst/>
@@ -4005,201 +3356,13 @@
             <a:r>
               <a:rPr sz="700" b="1">
                 <a:solidFill>
-                  <a:srgbClr val="EFE0D2"/>
-                </a:solidFill>
-                <a:latin typeface="맑은 고딕"/>
-                <a:ea typeface="맑은 고딕"/>
-              </a:rPr>
-              <a:t>E</a:t>
-            </a:r>
-          </a:p>
-        </p:txBody>
-      </p:sp>
-      <p:sp>
-        <p:nvSpPr>
-          <p:cNvPr id="30" name="텍스트"/>
-          <p:cNvSpPr txBox="1"/>
-          <p:nvPr/>
-        </p:nvSpPr>
-        <p:spPr>
-          <a:xfrm>
-            <a:off x="396000" y="1277711"/>
-            <a:ext cx="1584000" cy="168911"/>
-          </a:xfrm>
-          <a:prstGeom prst="rect">
-            <a:avLst/>
-          </a:prstGeom>
-          <a:noFill/>
-        </p:spPr>
-        <p:txBody>
-          <a:bodyPr wrap="square" lIns="0" rIns="0" tIns="0" bIns="0" anchor="t">
-            <a:spAutoFit/>
-          </a:bodyPr>
-          <a:lstStyle/>
-          <a:p>
-            <a:pPr algn="l">
-              <a:lnSpc>
-                <a:spcPts val="1015"/>
-              </a:lnSpc>
-            </a:pPr>
-            <a:r>
-              <a:rPr sz="700" b="0">
-                <a:solidFill>
-                  <a:srgbClr val="FFFFFF"/>
+                  <a:srgbClr val="12151C"/>
                 </a:solidFill>
                 <a:latin typeface="맑은 고딕"/>
                 <a:ea typeface="맑은 고딕"/>
               </a:rPr>
               <a:t>name@example.com</a:t>
             </a:r>
-          </a:p>
-        </p:txBody>
-      </p:sp>
-      <p:sp>
-        <p:nvSpPr>
-          <p:cNvPr id="31" name="텍스트"/>
-          <p:cNvSpPr txBox="1"/>
-          <p:nvPr/>
-        </p:nvSpPr>
-        <p:spPr>
-          <a:xfrm>
-            <a:off x="252000" y="1446622"/>
-            <a:ext cx="122400" cy="168911"/>
-          </a:xfrm>
-          <a:prstGeom prst="rect">
-            <a:avLst/>
-          </a:prstGeom>
-          <a:noFill/>
-        </p:spPr>
-        <p:txBody>
-          <a:bodyPr wrap="square" lIns="0" rIns="0" tIns="0" bIns="0" anchor="t">
-            <a:spAutoFit/>
-          </a:bodyPr>
-          <a:lstStyle/>
-          <a:p>
-            <a:pPr algn="l">
-              <a:lnSpc>
-                <a:spcPts val="1015"/>
-              </a:lnSpc>
-            </a:pPr>
-            <a:r>
-              <a:rPr sz="700" b="1">
-                <a:solidFill>
-                  <a:srgbClr val="EFE0D2"/>
-                </a:solidFill>
-                <a:latin typeface="맑은 고딕"/>
-                <a:ea typeface="맑은 고딕"/>
-              </a:rPr>
-              <a:t>A</a:t>
-            </a:r>
-          </a:p>
-        </p:txBody>
-      </p:sp>
-      <p:sp>
-        <p:nvSpPr>
-          <p:cNvPr id="32" name="텍스트"/>
-          <p:cNvSpPr txBox="1"/>
-          <p:nvPr/>
-        </p:nvSpPr>
-        <p:spPr>
-          <a:xfrm>
-            <a:off x="396000" y="1446622"/>
-            <a:ext cx="1584000" cy="168911"/>
-          </a:xfrm>
-          <a:prstGeom prst="rect">
-            <a:avLst/>
-          </a:prstGeom>
-          <a:noFill/>
-        </p:spPr>
-        <p:txBody>
-          <a:bodyPr wrap="square" lIns="0" rIns="0" tIns="0" bIns="0" anchor="t">
-            <a:spAutoFit/>
-          </a:bodyPr>
-          <a:lstStyle/>
-          <a:p>
-            <a:pPr algn="l">
-              <a:lnSpc>
-                <a:spcPts val="1015"/>
-              </a:lnSpc>
-            </a:pPr>
-            <a:r>
-              <a:rPr sz="700" b="0">
-                <a:solidFill>
-                  <a:srgbClr val="FFFFFF"/>
-                </a:solidFill>
-                <a:latin typeface="맑은 고딕"/>
-                <a:ea typeface="맑은 고딕"/>
-              </a:rPr>
-              <a:t>주소를 입력해 주세요</a:t>
-            </a:r>
-          </a:p>
-        </p:txBody>
-      </p:sp>
-      <p:sp>
-        <p:nvSpPr>
-          <p:cNvPr id="33" name="Freeform 32"/>
-          <p:cNvSpPr/>
-          <p:nvPr/>
-        </p:nvSpPr>
-        <p:spPr>
-          <a:xfrm>
-            <a:off x="2754004" y="1055520"/>
-            <a:ext cx="251992" cy="239659"/>
-          </a:xfrm>
-          <a:custGeom>
-            <a:avLst/>
-            <a:gdLst/>
-            <a:ahLst/>
-            <a:cxnLst/>
-            <a:rect l="l" t="t" r="r" b="b"/>
-            <a:pathLst>
-              <a:path w="251992" h="239659">
-                <a:moveTo>
-                  <a:pt x="125996" y="0"/>
-                </a:moveTo>
-                <a:lnTo>
-                  <a:pt x="158160" y="88211"/>
-                </a:lnTo>
-                <a:lnTo>
-                  <a:pt x="251992" y="91541"/>
-                </a:lnTo>
-                <a:lnTo>
-                  <a:pt x="178038" y="149389"/>
-                </a:lnTo>
-                <a:lnTo>
-                  <a:pt x="203866" y="239659"/>
-                </a:lnTo>
-                <a:lnTo>
-                  <a:pt x="125996" y="187200"/>
-                </a:lnTo>
-                <a:lnTo>
-                  <a:pt x="48126" y="239659"/>
-                </a:lnTo>
-                <a:lnTo>
-                  <a:pt x="73954" y="149389"/>
-                </a:lnTo>
-                <a:lnTo>
-                  <a:pt x="0" y="91541"/>
-                </a:lnTo>
-                <a:lnTo>
-                  <a:pt x="93832" y="88211"/>
-                </a:lnTo>
-                <a:close/>
-              </a:path>
-            </a:pathLst>
-          </a:custGeom>
-          <a:solidFill>
-            <a:srgbClr val="EFE0D2"/>
-          </a:solidFill>
-          <a:ln>
-            <a:noFill/>
-          </a:ln>
-        </p:spPr>
-        <p:txBody>
-          <a:bodyPr rtlCol="0" anchor="ctr"/>
-          <a:lstStyle/>
-          <a:p>
-            <a:pPr algn="ctr"/>
           </a:p>
         </p:txBody>
       </p:sp>
@@ -4217,7 +3380,7 @@
     <p:bg>
       <p:bgPr>
         <a:solidFill>
-          <a:srgbClr val="5E4226"/>
+          <a:srgbClr val="5CD65C"/>
         </a:solidFill>
         <a:effectLst/>
       </p:bgPr>
@@ -4237,14 +3400,14 @@
         </p:nvSpPr>
         <p:spPr>
           <a:xfrm>
-            <a:off x="0" y="0"/>
-            <a:ext cx="3240000" cy="1800000"/>
+            <a:off x="252000" y="540000"/>
+            <a:ext cx="28800" cy="720000"/>
           </a:xfrm>
           <a:prstGeom prst="rect">
             <a:avLst/>
           </a:prstGeom>
           <a:solidFill>
-            <a:srgbClr val="EFE0D2"/>
+            <a:srgbClr val="12151C"/>
           </a:solidFill>
           <a:ln>
             <a:noFill/>
@@ -4260,82 +3423,14 @@
       </p:sp>
       <p:sp>
         <p:nvSpPr>
-          <p:cNvPr id="3" name="Freeform 2"/>
-          <p:cNvSpPr/>
+          <p:cNvPr id="3" name="텍스트"/>
+          <p:cNvSpPr txBox="1"/>
           <p:nvPr/>
         </p:nvSpPr>
         <p:spPr>
           <a:xfrm>
-            <a:off x="1462505" y="374400"/>
-            <a:ext cx="314990" cy="299573"/>
-          </a:xfrm>
-          <a:custGeom>
-            <a:avLst/>
-            <a:gdLst/>
-            <a:ahLst/>
-            <a:cxnLst/>
-            <a:rect l="l" t="t" r="r" b="b"/>
-            <a:pathLst>
-              <a:path w="314990" h="299573">
-                <a:moveTo>
-                  <a:pt x="157495" y="0"/>
-                </a:moveTo>
-                <a:lnTo>
-                  <a:pt x="197700" y="110263"/>
-                </a:lnTo>
-                <a:lnTo>
-                  <a:pt x="314990" y="114427"/>
-                </a:lnTo>
-                <a:lnTo>
-                  <a:pt x="222547" y="186737"/>
-                </a:lnTo>
-                <a:lnTo>
-                  <a:pt x="254832" y="299573"/>
-                </a:lnTo>
-                <a:lnTo>
-                  <a:pt x="157495" y="234000"/>
-                </a:lnTo>
-                <a:lnTo>
-                  <a:pt x="60158" y="299573"/>
-                </a:lnTo>
-                <a:lnTo>
-                  <a:pt x="92443" y="186737"/>
-                </a:lnTo>
-                <a:lnTo>
-                  <a:pt x="0" y="114427"/>
-                </a:lnTo>
-                <a:lnTo>
-                  <a:pt x="117290" y="110263"/>
-                </a:lnTo>
-                <a:close/>
-              </a:path>
-            </a:pathLst>
-          </a:custGeom>
-          <a:solidFill>
-            <a:srgbClr val="595959"/>
-          </a:solidFill>
-          <a:ln>
-            <a:noFill/>
-          </a:ln>
-        </p:spPr>
-        <p:txBody>
-          <a:bodyPr rtlCol="0" anchor="ctr"/>
-          <a:lstStyle/>
-          <a:p>
-            <a:pPr algn="ctr"/>
-          </a:p>
-        </p:txBody>
-      </p:sp>
-      <p:sp>
-        <p:nvSpPr>
-          <p:cNvPr id="4" name="텍스트"/>
-          <p:cNvSpPr txBox="1"/>
-          <p:nvPr/>
-        </p:nvSpPr>
-        <p:spPr>
-          <a:xfrm>
-            <a:off x="396000" y="835200"/>
-            <a:ext cx="2448000" cy="396000"/>
+            <a:off x="424800" y="612000"/>
+            <a:ext cx="2160000" cy="648000"/>
           </a:xfrm>
           <a:prstGeom prst="rect">
             <a:avLst/>
@@ -4343,23 +3438,23 @@
           <a:noFill/>
         </p:spPr>
         <p:txBody>
-          <a:bodyPr wrap="square" lIns="0" rIns="0" tIns="0" bIns="0" anchor="ctr">
+          <a:bodyPr wrap="square" lIns="0" rIns="0" tIns="0" bIns="0" anchor="t">
             <a:spAutoFit/>
           </a:bodyPr>
           <a:lstStyle/>
           <a:p>
-            <a:pPr algn="ctr">
+            <a:pPr algn="l">
               <a:lnSpc>
-                <a:spcPts val="1667"/>
+                <a:spcPts val="1812"/>
               </a:lnSpc>
             </a:pPr>
             <a:r>
-              <a:rPr sz="1150" b="1">
+              <a:rPr sz="1250" b="1">
                 <a:solidFill>
-                  <a:srgbClr val="595959"/>
+                  <a:srgbClr val="12151C"/>
                 </a:solidFill>
-                <a:latin typeface="바탕"/>
-                <a:ea typeface="바탕"/>
+                <a:latin typeface="맑은 고딕"/>
+                <a:ea typeface="맑은 고딕"/>
               </a:rPr>
               <a:t>사장님이 직접 만듭니다</a:t>
             </a:r>
@@ -4368,14 +3463,14 @@
       </p:sp>
       <p:sp>
         <p:nvSpPr>
-          <p:cNvPr id="5" name="텍스트"/>
+          <p:cNvPr id="4" name="텍스트"/>
           <p:cNvSpPr txBox="1"/>
           <p:nvPr/>
         </p:nvSpPr>
         <p:spPr>
           <a:xfrm>
-            <a:off x="360000" y="1476000"/>
-            <a:ext cx="2520000" cy="108000"/>
+            <a:off x="424800" y="1512000"/>
+            <a:ext cx="1800000" cy="123826"/>
           </a:xfrm>
           <a:prstGeom prst="rect">
             <a:avLst/>
@@ -4388,15 +3483,15 @@
           </a:bodyPr>
           <a:lstStyle/>
           <a:p>
-            <a:pPr algn="ctr">
+            <a:pPr algn="l">
               <a:lnSpc>
-                <a:spcPts val="1015"/>
+                <a:spcPts val="942"/>
               </a:lnSpc>
             </a:pPr>
             <a:r>
-              <a:rPr sz="700" b="1" spc="300">
+              <a:rPr sz="650" b="1" spc="200">
                 <a:solidFill>
-                  <a:srgbClr val="595959"/>
+                  <a:srgbClr val="223F2A"/>
                 </a:solidFill>
                 <a:latin typeface="맑은 고딕"/>
                 <a:ea typeface="맑은 고딕"/>

--- a/public/fun/cards/food/food-30.pptx
+++ b/public/fun/cards/food/food-30.pptx
@@ -3105,8 +3105,8 @@
         </p:nvSpPr>
         <p:spPr>
           <a:xfrm>
-            <a:off x="252000" y="223200"/>
-            <a:ext cx="2016000" cy="133351"/>
+            <a:off x="252000" y="252000"/>
+            <a:ext cx="1512000" cy="123826"/>
           </a:xfrm>
           <a:prstGeom prst="rect">
             <a:avLst/>
@@ -3121,11 +3121,11 @@
           <a:p>
             <a:pPr algn="l">
               <a:lnSpc>
-                <a:spcPts val="1015"/>
+                <a:spcPts val="942"/>
               </a:lnSpc>
             </a:pPr>
             <a:r>
-              <a:rPr sz="700" b="1" spc="200">
+              <a:rPr sz="650" b="1" spc="220">
                 <a:solidFill>
                   <a:srgbClr val="6B7280"/>
                 </a:solidFill>
@@ -3137,16 +3137,37 @@
           </a:p>
         </p:txBody>
       </p:sp>
-      <p:sp>
-        <p:nvSpPr>
-          <p:cNvPr id="3" name="텍스트"/>
+      <p:cxnSp>
+        <p:nvCxnSpPr>
+          <p:cNvPr id="3" name="Connector 2"/>
+          <p:cNvCxnSpPr/>
+          <p:nvPr/>
+        </p:nvCxnSpPr>
+        <p:spPr>
+          <a:xfrm>
+            <a:off x="252000" y="388800"/>
+            <a:ext cx="2736000" cy="0"/>
+          </a:xfrm>
+          <a:prstGeom prst="line">
+            <a:avLst/>
+          </a:prstGeom>
+          <a:ln w="3600">
+            <a:solidFill>
+              <a:srgbClr val="DCDFE4"/>
+            </a:solidFill>
+          </a:ln>
+        </p:spPr>
+      </p:cxnSp>
+      <p:sp>
+        <p:nvSpPr>
+          <p:cNvPr id="4" name="텍스트"/>
           <p:cNvSpPr txBox="1"/>
           <p:nvPr/>
         </p:nvSpPr>
         <p:spPr>
           <a:xfrm>
-            <a:off x="252000" y="468000"/>
-            <a:ext cx="2520000" cy="360000"/>
+            <a:off x="252000" y="576000"/>
+            <a:ext cx="1800000" cy="237600"/>
           </a:xfrm>
           <a:prstGeom prst="rect">
             <a:avLst/>
@@ -3161,11 +3182,11 @@
           <a:p>
             <a:pPr algn="l">
               <a:lnSpc>
-                <a:spcPts val="3190"/>
+                <a:spcPts val="1957"/>
               </a:lnSpc>
             </a:pPr>
             <a:r>
-              <a:rPr sz="2200" b="1">
+              <a:rPr sz="1350" b="1" spc="120">
                 <a:solidFill>
                   <a:srgbClr val="12151C"/>
                 </a:solidFill>
@@ -3179,14 +3200,14 @@
       </p:sp>
       <p:sp>
         <p:nvSpPr>
-          <p:cNvPr id="4" name="텍스트"/>
+          <p:cNvPr id="5" name="텍스트"/>
           <p:cNvSpPr txBox="1"/>
           <p:nvPr/>
         </p:nvSpPr>
         <p:spPr>
           <a:xfrm>
-            <a:off x="252000" y="871200"/>
-            <a:ext cx="2520000" cy="171451"/>
+            <a:off x="252000" y="828000"/>
+            <a:ext cx="1800000" cy="133351"/>
           </a:xfrm>
           <a:prstGeom prst="rect">
             <a:avLst/>
@@ -3201,11 +3222,11 @@
           <a:p>
             <a:pPr algn="l">
               <a:lnSpc>
-                <a:spcPts val="1305"/>
+                <a:spcPts val="1015"/>
               </a:lnSpc>
             </a:pPr>
             <a:r>
-              <a:rPr sz="900" b="0">
+              <a:rPr sz="700" b="0" spc="60">
                 <a:solidFill>
                   <a:srgbClr val="6B7280"/>
                 </a:solidFill>
@@ -3219,14 +3240,14 @@
       </p:sp>
       <p:sp>
         <p:nvSpPr>
-          <p:cNvPr id="5" name="텍스트"/>
+          <p:cNvPr id="6" name="텍스트"/>
           <p:cNvSpPr txBox="1"/>
           <p:nvPr/>
         </p:nvSpPr>
         <p:spPr>
           <a:xfrm>
-            <a:off x="252000" y="1216800"/>
-            <a:ext cx="2520000" cy="129541"/>
+            <a:off x="252000" y="1036800"/>
+            <a:ext cx="2520000" cy="123826"/>
           </a:xfrm>
           <a:prstGeom prst="rect">
             <a:avLst/>
@@ -3241,11 +3262,11 @@
           <a:p>
             <a:pPr algn="l">
               <a:lnSpc>
-                <a:spcPts val="986"/>
+                <a:spcPts val="942"/>
               </a:lnSpc>
             </a:pPr>
             <a:r>
-              <a:rPr sz="680" b="0">
+              <a:rPr sz="650" b="0">
                 <a:solidFill>
                   <a:srgbClr val="6B7280"/>
                 </a:solidFill>
@@ -3259,14 +3280,14 @@
       </p:sp>
       <p:sp>
         <p:nvSpPr>
-          <p:cNvPr id="6" name="Rectangle 5"/>
+          <p:cNvPr id="7" name="Rectangle 6"/>
           <p:cNvSpPr/>
           <p:nvPr/>
         </p:nvSpPr>
         <p:spPr>
           <a:xfrm>
-            <a:off x="0" y="1476000"/>
-            <a:ext cx="3240000" cy="324000"/>
+            <a:off x="0" y="1339200"/>
+            <a:ext cx="3240000" cy="460800"/>
           </a:xfrm>
           <a:prstGeom prst="rect">
             <a:avLst/>
@@ -3288,14 +3309,14 @@
       </p:sp>
       <p:sp>
         <p:nvSpPr>
-          <p:cNvPr id="7" name="텍스트"/>
+          <p:cNvPr id="8" name="텍스트"/>
           <p:cNvSpPr txBox="1"/>
           <p:nvPr/>
         </p:nvSpPr>
         <p:spPr>
           <a:xfrm>
-            <a:off x="252000" y="1569600"/>
-            <a:ext cx="1296000" cy="133351"/>
+            <a:off x="252000" y="1476000"/>
+            <a:ext cx="936000" cy="91441"/>
           </a:xfrm>
           <a:prstGeom prst="rect">
             <a:avLst/>
@@ -3310,11 +3331,53 @@
           <a:p>
             <a:pPr algn="l">
               <a:lnSpc>
-                <a:spcPts val="1015"/>
+                <a:spcPts val="696"/>
               </a:lnSpc>
             </a:pPr>
             <a:r>
-              <a:rPr sz="700" b="1">
+              <a:rPr sz="480" b="1" spc="140">
+                <a:solidFill>
+                  <a:srgbClr val="12151C">
+                    <a:alpha val="70000"/>
+                  </a:srgbClr>
+                </a:solidFill>
+                <a:latin typeface="맑은 고딕"/>
+                <a:ea typeface="맑은 고딕"/>
+              </a:rPr>
+              <a:t>TEL</a:t>
+            </a:r>
+          </a:p>
+        </p:txBody>
+      </p:sp>
+      <p:sp>
+        <p:nvSpPr>
+          <p:cNvPr id="9" name="텍스트"/>
+          <p:cNvSpPr txBox="1"/>
+          <p:nvPr/>
+        </p:nvSpPr>
+        <p:spPr>
+          <a:xfrm>
+            <a:off x="252000" y="1576800"/>
+            <a:ext cx="936000" cy="123826"/>
+          </a:xfrm>
+          <a:prstGeom prst="rect">
+            <a:avLst/>
+          </a:prstGeom>
+          <a:noFill/>
+        </p:spPr>
+        <p:txBody>
+          <a:bodyPr wrap="square" lIns="0" rIns="0" tIns="0" bIns="0" anchor="t">
+            <a:spAutoFit/>
+          </a:bodyPr>
+          <a:lstStyle/>
+          <a:p>
+            <a:pPr algn="l">
+              <a:lnSpc>
+                <a:spcPts val="942"/>
+              </a:lnSpc>
+            </a:pPr>
+            <a:r>
+              <a:rPr sz="650" b="1">
                 <a:solidFill>
                   <a:srgbClr val="12151C"/>
                 </a:solidFill>
@@ -3328,14 +3391,14 @@
       </p:sp>
       <p:sp>
         <p:nvSpPr>
-          <p:cNvPr id="8" name="텍스트"/>
+          <p:cNvPr id="10" name="텍스트"/>
           <p:cNvSpPr txBox="1"/>
           <p:nvPr/>
         </p:nvSpPr>
         <p:spPr>
           <a:xfrm>
-            <a:off x="1656000" y="1569600"/>
-            <a:ext cx="1368000" cy="133351"/>
+            <a:off x="1188000" y="1476000"/>
+            <a:ext cx="1080000" cy="91441"/>
           </a:xfrm>
           <a:prstGeom prst="rect">
             <a:avLst/>
@@ -3350,11 +3413,53 @@
           <a:p>
             <a:pPr algn="l">
               <a:lnSpc>
-                <a:spcPts val="1015"/>
+                <a:spcPts val="696"/>
               </a:lnSpc>
             </a:pPr>
             <a:r>
-              <a:rPr sz="700" b="1">
+              <a:rPr sz="480" b="1" spc="140">
+                <a:solidFill>
+                  <a:srgbClr val="12151C">
+                    <a:alpha val="70000"/>
+                  </a:srgbClr>
+                </a:solidFill>
+                <a:latin typeface="맑은 고딕"/>
+                <a:ea typeface="맑은 고딕"/>
+              </a:rPr>
+              <a:t>MAIL</a:t>
+            </a:r>
+          </a:p>
+        </p:txBody>
+      </p:sp>
+      <p:sp>
+        <p:nvSpPr>
+          <p:cNvPr id="11" name="텍스트"/>
+          <p:cNvSpPr txBox="1"/>
+          <p:nvPr/>
+        </p:nvSpPr>
+        <p:spPr>
+          <a:xfrm>
+            <a:off x="1188000" y="1576800"/>
+            <a:ext cx="1080000" cy="123826"/>
+          </a:xfrm>
+          <a:prstGeom prst="rect">
+            <a:avLst/>
+          </a:prstGeom>
+          <a:noFill/>
+        </p:spPr>
+        <p:txBody>
+          <a:bodyPr wrap="square" lIns="0" rIns="0" tIns="0" bIns="0" anchor="t">
+            <a:spAutoFit/>
+          </a:bodyPr>
+          <a:lstStyle/>
+          <a:p>
+            <a:pPr algn="l">
+              <a:lnSpc>
+                <a:spcPts val="942"/>
+              </a:lnSpc>
+            </a:pPr>
+            <a:r>
+              <a:rPr sz="650" b="1">
                 <a:solidFill>
                   <a:srgbClr val="12151C"/>
                 </a:solidFill>
@@ -3366,6 +3471,27 @@
           </a:p>
         </p:txBody>
       </p:sp>
+      <p:cxnSp>
+        <p:nvCxnSpPr>
+          <p:cNvPr id="12" name="Connector 11"/>
+          <p:cNvCxnSpPr/>
+          <p:nvPr/>
+        </p:nvCxnSpPr>
+        <p:spPr>
+          <a:xfrm>
+            <a:off x="1108800" y="1468800"/>
+            <a:ext cx="0" cy="208800"/>
+          </a:xfrm>
+          <a:prstGeom prst="line">
+            <a:avLst/>
+          </a:prstGeom>
+          <a:ln w="3600">
+            <a:solidFill>
+              <a:srgbClr val="12151C"/>
+            </a:solidFill>
+          </a:ln>
+        </p:spPr>
+      </p:cxnSp>
     </p:spTree>
   </p:cSld>
   <p:clrMapOvr>
@@ -3394,43 +3520,14 @@
       <p:grpSpPr/>
       <p:sp>
         <p:nvSpPr>
-          <p:cNvPr id="2" name="Rectangle 1"/>
-          <p:cNvSpPr/>
-          <p:nvPr/>
-        </p:nvSpPr>
-        <p:spPr>
-          <a:xfrm>
-            <a:off x="252000" y="540000"/>
-            <a:ext cx="28800" cy="720000"/>
-          </a:xfrm>
-          <a:prstGeom prst="rect">
-            <a:avLst/>
-          </a:prstGeom>
-          <a:solidFill>
-            <a:srgbClr val="12151C"/>
-          </a:solidFill>
-          <a:ln>
-            <a:noFill/>
-          </a:ln>
-        </p:spPr>
-        <p:txBody>
-          <a:bodyPr rtlCol="0" anchor="ctr"/>
-          <a:lstStyle/>
-          <a:p>
-            <a:pPr algn="ctr"/>
-          </a:p>
-        </p:txBody>
-      </p:sp>
-      <p:sp>
-        <p:nvSpPr>
-          <p:cNvPr id="3" name="텍스트"/>
+          <p:cNvPr id="2" name="텍스트"/>
           <p:cNvSpPr txBox="1"/>
           <p:nvPr/>
         </p:nvSpPr>
         <p:spPr>
           <a:xfrm>
-            <a:off x="424800" y="612000"/>
-            <a:ext cx="2160000" cy="648000"/>
+            <a:off x="252000" y="223200"/>
+            <a:ext cx="1080000" cy="99061"/>
           </a:xfrm>
           <a:prstGeom prst="rect">
             <a:avLst/>
@@ -3445,32 +3542,93 @@
           <a:p>
             <a:pPr algn="l">
               <a:lnSpc>
-                <a:spcPts val="1812"/>
+                <a:spcPts val="754"/>
               </a:lnSpc>
             </a:pPr>
             <a:r>
-              <a:rPr sz="1250" b="1">
+              <a:rPr sz="520" b="1" spc="240">
+                <a:solidFill>
+                  <a:srgbClr val="223F2A"/>
+                </a:solidFill>
+                <a:latin typeface="맑은 고딕"/>
+                <a:ea typeface="맑은 고딕"/>
+              </a:rPr>
+              <a:t>대표 메뉴</a:t>
+            </a:r>
+          </a:p>
+        </p:txBody>
+      </p:sp>
+      <p:cxnSp>
+        <p:nvCxnSpPr>
+          <p:cNvPr id="3" name="Connector 2"/>
+          <p:cNvCxnSpPr/>
+          <p:nvPr/>
+        </p:nvCxnSpPr>
+        <p:spPr>
+          <a:xfrm>
+            <a:off x="252000" y="388800"/>
+            <a:ext cx="2736000" cy="0"/>
+          </a:xfrm>
+          <a:prstGeom prst="line">
+            <a:avLst/>
+          </a:prstGeom>
+          <a:ln w="3600">
+            <a:solidFill>
+              <a:srgbClr val="3E8942"/>
+            </a:solidFill>
+          </a:ln>
+        </p:spPr>
+      </p:cxnSp>
+      <p:sp>
+        <p:nvSpPr>
+          <p:cNvPr id="4" name="텍스트"/>
+          <p:cNvSpPr txBox="1"/>
+          <p:nvPr/>
+        </p:nvSpPr>
+        <p:spPr>
+          <a:xfrm>
+            <a:off x="252000" y="468000"/>
+            <a:ext cx="216000" cy="99061"/>
+          </a:xfrm>
+          <a:prstGeom prst="rect">
+            <a:avLst/>
+          </a:prstGeom>
+          <a:noFill/>
+        </p:spPr>
+        <p:txBody>
+          <a:bodyPr wrap="square" lIns="0" rIns="0" tIns="0" bIns="0" anchor="t">
+            <a:spAutoFit/>
+          </a:bodyPr>
+          <a:lstStyle/>
+          <a:p>
+            <a:pPr algn="l">
+              <a:lnSpc>
+                <a:spcPts val="754"/>
+              </a:lnSpc>
+            </a:pPr>
+            <a:r>
+              <a:rPr sz="520" b="1" spc="100">
                 <a:solidFill>
                   <a:srgbClr val="12151C"/>
                 </a:solidFill>
                 <a:latin typeface="맑은 고딕"/>
                 <a:ea typeface="맑은 고딕"/>
               </a:rPr>
-              <a:t>사장님이 직접 만듭니다</a:t>
-            </a:r>
-          </a:p>
-        </p:txBody>
-      </p:sp>
-      <p:sp>
-        <p:nvSpPr>
-          <p:cNvPr id="4" name="텍스트"/>
+              <a:t>01</a:t>
+            </a:r>
+          </a:p>
+        </p:txBody>
+      </p:sp>
+      <p:sp>
+        <p:nvSpPr>
+          <p:cNvPr id="5" name="텍스트"/>
           <p:cNvSpPr txBox="1"/>
           <p:nvPr/>
         </p:nvSpPr>
         <p:spPr>
           <a:xfrm>
-            <a:off x="424800" y="1512000"/>
-            <a:ext cx="1800000" cy="123826"/>
+            <a:off x="475200" y="457200"/>
+            <a:ext cx="1152000" cy="140971"/>
           </a:xfrm>
           <a:prstGeom prst="rect">
             <a:avLst/>
@@ -3485,18 +3643,422 @@
           <a:p>
             <a:pPr algn="l">
               <a:lnSpc>
-                <a:spcPts val="942"/>
+                <a:spcPts val="1073"/>
               </a:lnSpc>
             </a:pPr>
             <a:r>
-              <a:rPr sz="650" b="1" spc="200">
+              <a:rPr sz="740" b="0">
+                <a:solidFill>
+                  <a:srgbClr val="12151C"/>
+                </a:solidFill>
+                <a:latin typeface="맑은 고딕"/>
+                <a:ea typeface="맑은 고딕"/>
+              </a:rPr>
+              <a:t>아메리카노</a:t>
+            </a:r>
+          </a:p>
+        </p:txBody>
+      </p:sp>
+      <p:cxnSp>
+        <p:nvCxnSpPr>
+          <p:cNvPr id="6" name="Connector 5"/>
+          <p:cNvCxnSpPr/>
+          <p:nvPr/>
+        </p:nvCxnSpPr>
+        <p:spPr>
+          <a:xfrm>
+            <a:off x="252000" y="691200"/>
+            <a:ext cx="1296000" cy="0"/>
+          </a:xfrm>
+          <a:prstGeom prst="line">
+            <a:avLst/>
+          </a:prstGeom>
+          <a:ln w="3600">
+            <a:solidFill>
+              <a:srgbClr val="3E8942"/>
+            </a:solidFill>
+          </a:ln>
+        </p:spPr>
+      </p:cxnSp>
+      <p:sp>
+        <p:nvSpPr>
+          <p:cNvPr id="7" name="텍스트"/>
+          <p:cNvSpPr txBox="1"/>
+          <p:nvPr/>
+        </p:nvSpPr>
+        <p:spPr>
+          <a:xfrm>
+            <a:off x="1656000" y="468000"/>
+            <a:ext cx="216000" cy="99061"/>
+          </a:xfrm>
+          <a:prstGeom prst="rect">
+            <a:avLst/>
+          </a:prstGeom>
+          <a:noFill/>
+        </p:spPr>
+        <p:txBody>
+          <a:bodyPr wrap="square" lIns="0" rIns="0" tIns="0" bIns="0" anchor="t">
+            <a:spAutoFit/>
+          </a:bodyPr>
+          <a:lstStyle/>
+          <a:p>
+            <a:pPr algn="l">
+              <a:lnSpc>
+                <a:spcPts val="754"/>
+              </a:lnSpc>
+            </a:pPr>
+            <a:r>
+              <a:rPr sz="520" b="1" spc="100">
+                <a:solidFill>
+                  <a:srgbClr val="12151C"/>
+                </a:solidFill>
+                <a:latin typeface="맑은 고딕"/>
+                <a:ea typeface="맑은 고딕"/>
+              </a:rPr>
+              <a:t>02</a:t>
+            </a:r>
+          </a:p>
+        </p:txBody>
+      </p:sp>
+      <p:sp>
+        <p:nvSpPr>
+          <p:cNvPr id="8" name="텍스트"/>
+          <p:cNvSpPr txBox="1"/>
+          <p:nvPr/>
+        </p:nvSpPr>
+        <p:spPr>
+          <a:xfrm>
+            <a:off x="1879200" y="457200"/>
+            <a:ext cx="1152000" cy="140971"/>
+          </a:xfrm>
+          <a:prstGeom prst="rect">
+            <a:avLst/>
+          </a:prstGeom>
+          <a:noFill/>
+        </p:spPr>
+        <p:txBody>
+          <a:bodyPr wrap="square" lIns="0" rIns="0" tIns="0" bIns="0" anchor="t">
+            <a:spAutoFit/>
+          </a:bodyPr>
+          <a:lstStyle/>
+          <a:p>
+            <a:pPr algn="l">
+              <a:lnSpc>
+                <a:spcPts val="1073"/>
+              </a:lnSpc>
+            </a:pPr>
+            <a:r>
+              <a:rPr sz="740" b="0">
+                <a:solidFill>
+                  <a:srgbClr val="12151C"/>
+                </a:solidFill>
+                <a:latin typeface="맑은 고딕"/>
+                <a:ea typeface="맑은 고딕"/>
+              </a:rPr>
+              <a:t>케이터링</a:t>
+            </a:r>
+          </a:p>
+        </p:txBody>
+      </p:sp>
+      <p:cxnSp>
+        <p:nvCxnSpPr>
+          <p:cNvPr id="9" name="Connector 8"/>
+          <p:cNvCxnSpPr/>
+          <p:nvPr/>
+        </p:nvCxnSpPr>
+        <p:spPr>
+          <a:xfrm>
+            <a:off x="1656000" y="691200"/>
+            <a:ext cx="1296000" cy="0"/>
+          </a:xfrm>
+          <a:prstGeom prst="line">
+            <a:avLst/>
+          </a:prstGeom>
+          <a:ln w="3600">
+            <a:solidFill>
+              <a:srgbClr val="3E8942"/>
+            </a:solidFill>
+          </a:ln>
+        </p:spPr>
+      </p:cxnSp>
+      <p:sp>
+        <p:nvSpPr>
+          <p:cNvPr id="10" name="텍스트"/>
+          <p:cNvSpPr txBox="1"/>
+          <p:nvPr/>
+        </p:nvSpPr>
+        <p:spPr>
+          <a:xfrm>
+            <a:off x="252000" y="813600"/>
+            <a:ext cx="216000" cy="99061"/>
+          </a:xfrm>
+          <a:prstGeom prst="rect">
+            <a:avLst/>
+          </a:prstGeom>
+          <a:noFill/>
+        </p:spPr>
+        <p:txBody>
+          <a:bodyPr wrap="square" lIns="0" rIns="0" tIns="0" bIns="0" anchor="t">
+            <a:spAutoFit/>
+          </a:bodyPr>
+          <a:lstStyle/>
+          <a:p>
+            <a:pPr algn="l">
+              <a:lnSpc>
+                <a:spcPts val="754"/>
+              </a:lnSpc>
+            </a:pPr>
+            <a:r>
+              <a:rPr sz="520" b="1" spc="100">
+                <a:solidFill>
+                  <a:srgbClr val="12151C"/>
+                </a:solidFill>
+                <a:latin typeface="맑은 고딕"/>
+                <a:ea typeface="맑은 고딕"/>
+              </a:rPr>
+              <a:t>03</a:t>
+            </a:r>
+          </a:p>
+        </p:txBody>
+      </p:sp>
+      <p:sp>
+        <p:nvSpPr>
+          <p:cNvPr id="11" name="텍스트"/>
+          <p:cNvSpPr txBox="1"/>
+          <p:nvPr/>
+        </p:nvSpPr>
+        <p:spPr>
+          <a:xfrm>
+            <a:off x="475200" y="802800"/>
+            <a:ext cx="1152000" cy="140971"/>
+          </a:xfrm>
+          <a:prstGeom prst="rect">
+            <a:avLst/>
+          </a:prstGeom>
+          <a:noFill/>
+        </p:spPr>
+        <p:txBody>
+          <a:bodyPr wrap="square" lIns="0" rIns="0" tIns="0" bIns="0" anchor="t">
+            <a:spAutoFit/>
+          </a:bodyPr>
+          <a:lstStyle/>
+          <a:p>
+            <a:pPr algn="l">
+              <a:lnSpc>
+                <a:spcPts val="1073"/>
+              </a:lnSpc>
+            </a:pPr>
+            <a:r>
+              <a:rPr sz="740" b="0">
+                <a:solidFill>
+                  <a:srgbClr val="12151C"/>
+                </a:solidFill>
+                <a:latin typeface="맑은 고딕"/>
+                <a:ea typeface="맑은 고딕"/>
+              </a:rPr>
+              <a:t>런치 세트</a:t>
+            </a:r>
+          </a:p>
+        </p:txBody>
+      </p:sp>
+      <p:cxnSp>
+        <p:nvCxnSpPr>
+          <p:cNvPr id="12" name="Connector 11"/>
+          <p:cNvCxnSpPr/>
+          <p:nvPr/>
+        </p:nvCxnSpPr>
+        <p:spPr>
+          <a:xfrm>
+            <a:off x="252000" y="1036800"/>
+            <a:ext cx="1296000" cy="0"/>
+          </a:xfrm>
+          <a:prstGeom prst="line">
+            <a:avLst/>
+          </a:prstGeom>
+          <a:ln w="3600">
+            <a:solidFill>
+              <a:srgbClr val="3E8942"/>
+            </a:solidFill>
+          </a:ln>
+        </p:spPr>
+      </p:cxnSp>
+      <p:sp>
+        <p:nvSpPr>
+          <p:cNvPr id="13" name="텍스트"/>
+          <p:cNvSpPr txBox="1"/>
+          <p:nvPr/>
+        </p:nvSpPr>
+        <p:spPr>
+          <a:xfrm>
+            <a:off x="1656000" y="813600"/>
+            <a:ext cx="216000" cy="99061"/>
+          </a:xfrm>
+          <a:prstGeom prst="rect">
+            <a:avLst/>
+          </a:prstGeom>
+          <a:noFill/>
+        </p:spPr>
+        <p:txBody>
+          <a:bodyPr wrap="square" lIns="0" rIns="0" tIns="0" bIns="0" anchor="t">
+            <a:spAutoFit/>
+          </a:bodyPr>
+          <a:lstStyle/>
+          <a:p>
+            <a:pPr algn="l">
+              <a:lnSpc>
+                <a:spcPts val="754"/>
+              </a:lnSpc>
+            </a:pPr>
+            <a:r>
+              <a:rPr sz="520" b="1" spc="100">
+                <a:solidFill>
+                  <a:srgbClr val="12151C"/>
+                </a:solidFill>
+                <a:latin typeface="맑은 고딕"/>
+                <a:ea typeface="맑은 고딕"/>
+              </a:rPr>
+              <a:t>04</a:t>
+            </a:r>
+          </a:p>
+        </p:txBody>
+      </p:sp>
+      <p:sp>
+        <p:nvSpPr>
+          <p:cNvPr id="14" name="텍스트"/>
+          <p:cNvSpPr txBox="1"/>
+          <p:nvPr/>
+        </p:nvSpPr>
+        <p:spPr>
+          <a:xfrm>
+            <a:off x="1879200" y="802800"/>
+            <a:ext cx="1152000" cy="140971"/>
+          </a:xfrm>
+          <a:prstGeom prst="rect">
+            <a:avLst/>
+          </a:prstGeom>
+          <a:noFill/>
+        </p:spPr>
+        <p:txBody>
+          <a:bodyPr wrap="square" lIns="0" rIns="0" tIns="0" bIns="0" anchor="t">
+            <a:spAutoFit/>
+          </a:bodyPr>
+          <a:lstStyle/>
+          <a:p>
+            <a:pPr algn="l">
+              <a:lnSpc>
+                <a:spcPts val="1073"/>
+              </a:lnSpc>
+            </a:pPr>
+            <a:r>
+              <a:rPr sz="740" b="0">
+                <a:solidFill>
+                  <a:srgbClr val="12151C"/>
+                </a:solidFill>
+                <a:latin typeface="맑은 고딕"/>
+                <a:ea typeface="맑은 고딕"/>
+              </a:rPr>
+              <a:t>원두 판매</a:t>
+            </a:r>
+          </a:p>
+        </p:txBody>
+      </p:sp>
+      <p:cxnSp>
+        <p:nvCxnSpPr>
+          <p:cNvPr id="15" name="Connector 14"/>
+          <p:cNvCxnSpPr/>
+          <p:nvPr/>
+        </p:nvCxnSpPr>
+        <p:spPr>
+          <a:xfrm>
+            <a:off x="1656000" y="1036800"/>
+            <a:ext cx="1296000" cy="0"/>
+          </a:xfrm>
+          <a:prstGeom prst="line">
+            <a:avLst/>
+          </a:prstGeom>
+          <a:ln w="3600">
+            <a:solidFill>
+              <a:srgbClr val="3E8942"/>
+            </a:solidFill>
+          </a:ln>
+        </p:spPr>
+      </p:cxnSp>
+      <p:sp>
+        <p:nvSpPr>
+          <p:cNvPr id="16" name="텍스트"/>
+          <p:cNvSpPr txBox="1"/>
+          <p:nvPr/>
+        </p:nvSpPr>
+        <p:spPr>
+          <a:xfrm>
+            <a:off x="252000" y="1569600"/>
+            <a:ext cx="1368000" cy="114301"/>
+          </a:xfrm>
+          <a:prstGeom prst="rect">
+            <a:avLst/>
+          </a:prstGeom>
+          <a:noFill/>
+        </p:spPr>
+        <p:txBody>
+          <a:bodyPr wrap="square" lIns="0" rIns="0" tIns="0" bIns="0" anchor="t">
+            <a:spAutoFit/>
+          </a:bodyPr>
+          <a:lstStyle/>
+          <a:p>
+            <a:pPr algn="l">
+              <a:lnSpc>
+                <a:spcPts val="869"/>
+              </a:lnSpc>
+            </a:pPr>
+            <a:r>
+              <a:rPr sz="600" b="0">
                 <a:solidFill>
                   <a:srgbClr val="223F2A"/>
                 </a:solidFill>
                 <a:latin typeface="맑은 고딕"/>
                 <a:ea typeface="맑은 고딕"/>
               </a:rPr>
-              <a:t>상호명</a:t>
+              <a:t>매일 08:00 – 20:00</a:t>
+            </a:r>
+          </a:p>
+        </p:txBody>
+      </p:sp>
+      <p:sp>
+        <p:nvSpPr>
+          <p:cNvPr id="17" name="텍스트"/>
+          <p:cNvSpPr txBox="1"/>
+          <p:nvPr/>
+        </p:nvSpPr>
+        <p:spPr>
+          <a:xfrm>
+            <a:off x="1620000" y="1569600"/>
+            <a:ext cx="1368000" cy="114301"/>
+          </a:xfrm>
+          <a:prstGeom prst="rect">
+            <a:avLst/>
+          </a:prstGeom>
+          <a:noFill/>
+        </p:spPr>
+        <p:txBody>
+          <a:bodyPr wrap="square" lIns="0" rIns="0" tIns="0" bIns="0" anchor="t">
+            <a:spAutoFit/>
+          </a:bodyPr>
+          <a:lstStyle/>
+          <a:p>
+            <a:pPr algn="r">
+              <a:lnSpc>
+                <a:spcPts val="869"/>
+              </a:lnSpc>
+            </a:pPr>
+            <a:r>
+              <a:rPr sz="600" b="0">
+                <a:solidFill>
+                  <a:srgbClr val="223F2A"/>
+                </a:solidFill>
+                <a:latin typeface="맑은 고딕"/>
+                <a:ea typeface="맑은 고딕"/>
+              </a:rPr>
+              <a:t>@채널아이디</a:t>
             </a:r>
           </a:p>
         </p:txBody>
